--- a/Annual TPM Performance Review - Part 1 - with charts.pptx
+++ b/Annual TPM Performance Review - Part 1 - with charts.pptx
@@ -5,10 +5,10 @@
     <p:sldMasterId id="2147483672" r:id="rId4"/>
   </p:sldMasterIdLst>
   <p:notesMasterIdLst>
-    <p:notesMasterId r:id="rId30"/>
+    <p:notesMasterId r:id="rId31"/>
   </p:notesMasterIdLst>
   <p:handoutMasterIdLst>
-    <p:handoutMasterId r:id="rId31"/>
+    <p:handoutMasterId r:id="rId32"/>
   </p:handoutMasterIdLst>
   <p:sldIdLst>
     <p:sldId id="409" r:id="rId5"/>
@@ -22,21 +22,21 @@
     <p:sldId id="885" r:id="rId13"/>
     <p:sldId id="893" r:id="rId14"/>
     <p:sldId id="883" r:id="rId15"/>
-    <p:sldId id="903" r:id="rId39"/>
-    <p:sldId id="886" r:id="rId16"/>
-    <p:sldId id="887" r:id="rId17"/>
-    <p:sldId id="889" r:id="rId18"/>
-    <p:sldId id="888" r:id="rId19"/>
-    <p:sldId id="901" r:id="rId20"/>
-    <p:sldId id="898" r:id="rId21"/>
-    <p:sldId id="891" r:id="rId22"/>
-    <p:sldId id="900" r:id="rId23"/>
-    <p:sldId id="899" r:id="rId24"/>
-    <p:sldId id="896" r:id="rId25"/>
-    <p:sldId id="892" r:id="rId26"/>
-    <p:sldId id="890" r:id="rId27"/>
-    <p:sldId id="894" r:id="rId28"/>
-    <p:sldId id="713" r:id="rId29"/>
+    <p:sldId id="903" r:id="rId16"/>
+    <p:sldId id="886" r:id="rId17"/>
+    <p:sldId id="887" r:id="rId18"/>
+    <p:sldId id="889" r:id="rId19"/>
+    <p:sldId id="888" r:id="rId20"/>
+    <p:sldId id="901" r:id="rId21"/>
+    <p:sldId id="898" r:id="rId22"/>
+    <p:sldId id="891" r:id="rId23"/>
+    <p:sldId id="900" r:id="rId24"/>
+    <p:sldId id="899" r:id="rId25"/>
+    <p:sldId id="896" r:id="rId26"/>
+    <p:sldId id="892" r:id="rId27"/>
+    <p:sldId id="890" r:id="rId28"/>
+    <p:sldId id="894" r:id="rId29"/>
+    <p:sldId id="713" r:id="rId30"/>
   </p:sldIdLst>
   <p:sldSz cx="12192000" cy="6858000"/>
   <p:notesSz cx="6797675" cy="9874250"/>
@@ -6144,6 +6144,95 @@
   <p:cSld>
     <p:spTree>
       <p:nvGrpSpPr>
+        <p:cNvPr id="1" name=""/>
+        <p:cNvGrpSpPr/>
+        <p:nvPr/>
+      </p:nvGrpSpPr>
+      <p:grpSpPr>
+        <a:xfrm>
+          <a:off x="0" y="0"/>
+          <a:ext cx="0" cy="0"/>
+          <a:chOff x="0" y="0"/>
+          <a:chExt cx="0" cy="0"/>
+        </a:xfrm>
+      </p:grpSpPr>
+      <p:sp>
+        <p:nvSpPr>
+          <p:cNvPr id="2" name="Title 1"/>
+          <p:cNvSpPr>
+            <a:spLocks noGrp="1"/>
+          </p:cNvSpPr>
+          <p:nvPr>
+            <p:ph type="title"/>
+          </p:nvPr>
+        </p:nvSpPr>
+        <p:spPr/>
+        <p:txBody>
+          <a:bodyPr/>
+          <a:lstStyle/>
+          <a:p>
+            <a:r>
+              <a:t>Post-Distribution Monitoring (PDM) deployments</a:t>
+            </a:r>
+          </a:p>
+        </p:txBody>
+      </p:sp>
+      <p:sp>
+        <p:nvSpPr>
+          <p:cNvPr id="3" name="Content Placeholder 2"/>
+          <p:cNvSpPr>
+            <a:spLocks noGrp="1"/>
+          </p:cNvSpPr>
+          <p:nvPr>
+            <p:ph idx="1"/>
+          </p:nvPr>
+        </p:nvSpPr>
+        <p:spPr/>
+        <p:txBody>
+          <a:bodyPr/>
+          <a:lstStyle/>
+          <a:p>
+            <a:endParaRPr/>
+          </a:p>
+        </p:txBody>
+      </p:sp>
+      <p:pic>
+        <p:nvPicPr>
+          <p:cNvPr id="4" name="Picture 3" descr="unnamed-chunk-10-1.png"/>
+          <p:cNvPicPr>
+            <a:picLocks noChangeAspect="1"/>
+          </p:cNvPicPr>
+          <p:nvPr/>
+        </p:nvPicPr>
+        <p:blipFill>
+          <a:blip r:embed="rId2"/>
+          <a:stretch>
+            <a:fillRect/>
+          </a:stretch>
+        </p:blipFill>
+        <p:spPr>
+          <a:xfrm>
+            <a:off x="641943" y="1615440"/>
+            <a:ext cx="10905066" cy="4876800"/>
+          </a:xfrm>
+          <a:prstGeom prst="rect">
+            <a:avLst/>
+          </a:prstGeom>
+        </p:spPr>
+      </p:pic>
+    </p:spTree>
+  </p:cSld>
+  <p:clrMapOvr>
+    <a:masterClrMapping/>
+  </p:clrMapOvr>
+</p:sld>
+</file>
+
+<file path=ppt/slides/slide13.xml><?xml version="1.0" encoding="utf-8"?>
+<p:sld xmlns:a="http://schemas.openxmlformats.org/drawingml/2006/main" xmlns:r="http://schemas.openxmlformats.org/officeDocument/2006/relationships" xmlns:p="http://schemas.openxmlformats.org/presentationml/2006/main">
+  <p:cSld>
+    <p:spTree>
+      <p:nvGrpSpPr>
         <p:cNvPr id="1" name="">
           <a:extLst>
             <a:ext uri="{FF2B5EF4-FFF2-40B4-BE49-F238E27FC236}">
@@ -6214,7 +6303,7 @@
             <a:fld id="{DE6B2AB2-6265-4A33-A62E-6921C5AD1A87}" type="slidenum">
               <a:rPr lang="de-DE" altLang="en-US" smtClean="0"/>
               <a:pPr/>
-              <a:t>12</a:t>
+              <a:t>13</a:t>
             </a:fld>
             <a:endParaRPr lang="de-DE" altLang="en-US"/>
           </a:p>
@@ -6288,7 +6377,7 @@
 </p:sld>
 </file>
 
-<file path=ppt/slides/slide13.xml><?xml version="1.0" encoding="utf-8"?>
+<file path=ppt/slides/slide14.xml><?xml version="1.0" encoding="utf-8"?>
 <p:sld xmlns:a="http://schemas.openxmlformats.org/drawingml/2006/main" xmlns:r="http://schemas.openxmlformats.org/officeDocument/2006/relationships" xmlns:p="http://schemas.openxmlformats.org/presentationml/2006/main">
   <p:cSld>
     <p:spTree>
@@ -6368,7 +6457,7 @@
             <a:fld id="{DE6B2AB2-6265-4A33-A62E-6921C5AD1A87}" type="slidenum">
               <a:rPr lang="de-DE" altLang="en-US" smtClean="0"/>
               <a:pPr/>
-              <a:t>13</a:t>
+              <a:t>14</a:t>
             </a:fld>
             <a:endParaRPr lang="de-DE" altLang="en-US"/>
           </a:p>
@@ -6442,7 +6531,7 @@
 </p:sld>
 </file>
 
-<file path=ppt/slides/slide14.xml><?xml version="1.0" encoding="utf-8"?>
+<file path=ppt/slides/slide15.xml><?xml version="1.0" encoding="utf-8"?>
 <p:sld xmlns:a="http://schemas.openxmlformats.org/drawingml/2006/main" xmlns:r="http://schemas.openxmlformats.org/officeDocument/2006/relationships" xmlns:p="http://schemas.openxmlformats.org/presentationml/2006/main">
   <p:cSld>
     <p:spTree>
@@ -6530,7 +6619,7 @@
             <a:fld id="{DE6B2AB2-6265-4A33-A62E-6921C5AD1A87}" type="slidenum">
               <a:rPr lang="de-DE" altLang="en-US" smtClean="0"/>
               <a:pPr/>
-              <a:t>14</a:t>
+              <a:t>15</a:t>
             </a:fld>
             <a:endParaRPr lang="de-DE" altLang="en-US"/>
           </a:p>
@@ -6604,7 +6693,7 @@
 </p:sld>
 </file>
 
-<file path=ppt/slides/slide15.xml><?xml version="1.0" encoding="utf-8"?>
+<file path=ppt/slides/slide16.xml><?xml version="1.0" encoding="utf-8"?>
 <p:sld xmlns:a="http://schemas.openxmlformats.org/drawingml/2006/main" xmlns:r="http://schemas.openxmlformats.org/officeDocument/2006/relationships" xmlns:p="http://schemas.openxmlformats.org/presentationml/2006/main">
   <p:cSld>
     <p:spTree>
@@ -6682,7 +6771,7 @@
             <a:fld id="{DE6B2AB2-6265-4A33-A62E-6921C5AD1A87}" type="slidenum">
               <a:rPr lang="de-DE" altLang="en-US" smtClean="0"/>
               <a:pPr/>
-              <a:t>15</a:t>
+              <a:t>16</a:t>
             </a:fld>
             <a:endParaRPr lang="de-DE" altLang="en-US"/>
           </a:p>
@@ -6756,7 +6845,7 @@
 </p:sld>
 </file>
 
-<file path=ppt/slides/slide16.xml><?xml version="1.0" encoding="utf-8"?>
+<file path=ppt/slides/slide17.xml><?xml version="1.0" encoding="utf-8"?>
 <p:sld xmlns:a="http://schemas.openxmlformats.org/drawingml/2006/main" xmlns:r="http://schemas.openxmlformats.org/officeDocument/2006/relationships" xmlns:p="http://schemas.openxmlformats.org/presentationml/2006/main">
   <p:cSld>
     <p:spTree>
@@ -6898,7 +6987,7 @@
             <a:fld id="{DE6B2AB2-6265-4A33-A62E-6921C5AD1A87}" type="slidenum">
               <a:rPr lang="de-DE" altLang="en-US" smtClean="0"/>
               <a:pPr/>
-              <a:t>16</a:t>
+              <a:t>17</a:t>
             </a:fld>
             <a:endParaRPr lang="de-DE" altLang="en-US"/>
           </a:p>
@@ -6948,7 +7037,7 @@
 </p:sld>
 </file>
 
-<file path=ppt/slides/slide17.xml><?xml version="1.0" encoding="utf-8"?>
+<file path=ppt/slides/slide18.xml><?xml version="1.0" encoding="utf-8"?>
 <p:sld xmlns:a="http://schemas.openxmlformats.org/drawingml/2006/main" xmlns:r="http://schemas.openxmlformats.org/officeDocument/2006/relationships" xmlns:p="http://schemas.openxmlformats.org/presentationml/2006/main">
   <p:cSld>
     <p:spTree>
@@ -7123,7 +7212,7 @@
             <a:fld id="{DE6B2AB2-6265-4A33-A62E-6921C5AD1A87}" type="slidenum">
               <a:rPr lang="de-DE" altLang="en-US" smtClean="0"/>
               <a:pPr/>
-              <a:t>17</a:t>
+              <a:t>18</a:t>
             </a:fld>
             <a:endParaRPr lang="de-DE" altLang="en-US"/>
           </a:p>
@@ -7173,7 +7262,7 @@
 </p:sld>
 </file>
 
-<file path=ppt/slides/slide18.xml><?xml version="1.0" encoding="utf-8"?>
+<file path=ppt/slides/slide19.xml><?xml version="1.0" encoding="utf-8"?>
 <p:sld xmlns:a="http://schemas.openxmlformats.org/drawingml/2006/main" xmlns:r="http://schemas.openxmlformats.org/officeDocument/2006/relationships" xmlns:p="http://schemas.openxmlformats.org/presentationml/2006/main">
   <p:cSld>
     <p:spTree>
@@ -8319,7 +8408,7 @@
             <a:fld id="{DE6B2AB2-6265-4A33-A62E-6921C5AD1A87}" type="slidenum">
               <a:rPr lang="de-DE" altLang="en-US" smtClean="0"/>
               <a:pPr/>
-              <a:t>18</a:t>
+              <a:t>19</a:t>
             </a:fld>
             <a:endParaRPr lang="de-DE" altLang="en-US"/>
           </a:p>
@@ -8360,197 +8449,6 @@
     <p:extLst>
       <p:ext uri="{BB962C8B-B14F-4D97-AF65-F5344CB8AC3E}">
         <p14:creationId xmlns:p14="http://schemas.microsoft.com/office/powerpoint/2010/main" val="3999045444"/>
-      </p:ext>
-    </p:extLst>
-  </p:cSld>
-  <p:clrMapOvr>
-    <a:masterClrMapping/>
-  </p:clrMapOvr>
-</p:sld>
-</file>
-
-<file path=ppt/slides/slide19.xml><?xml version="1.0" encoding="utf-8"?>
-<p:sld xmlns:a="http://schemas.openxmlformats.org/drawingml/2006/main" xmlns:r="http://schemas.openxmlformats.org/officeDocument/2006/relationships" xmlns:p="http://schemas.openxmlformats.org/presentationml/2006/main">
-  <p:cSld>
-    <p:spTree>
-      <p:nvGrpSpPr>
-        <p:cNvPr id="1" name="">
-          <a:extLst>
-            <a:ext uri="{FF2B5EF4-FFF2-40B4-BE49-F238E27FC236}">
-              <a16:creationId xmlns:a16="http://schemas.microsoft.com/office/drawing/2014/main" id="{113E768E-375C-767C-6554-9C16F68B14A9}"/>
-            </a:ext>
-          </a:extLst>
-        </p:cNvPr>
-        <p:cNvGrpSpPr/>
-        <p:nvPr/>
-      </p:nvGrpSpPr>
-      <p:grpSpPr>
-        <a:xfrm>
-          <a:off x="0" y="0"/>
-          <a:ext cx="0" cy="0"/>
-          <a:chOff x="0" y="0"/>
-          <a:chExt cx="0" cy="0"/>
-        </a:xfrm>
-      </p:grpSpPr>
-      <p:sp>
-        <p:nvSpPr>
-          <p:cNvPr id="2" name="Title 1">
-            <a:extLst>
-              <a:ext uri="{FF2B5EF4-FFF2-40B4-BE49-F238E27FC236}">
-                <a16:creationId xmlns:a16="http://schemas.microsoft.com/office/drawing/2014/main" id="{26946287-ECCF-FD83-43D5-189E02DCF73F}"/>
-              </a:ext>
-            </a:extLst>
-          </p:cNvPr>
-          <p:cNvSpPr>
-            <a:spLocks noGrp="1"/>
-          </p:cNvSpPr>
-          <p:nvPr>
-            <p:ph type="title"/>
-          </p:nvPr>
-        </p:nvSpPr>
-        <p:spPr/>
-        <p:txBody>
-          <a:bodyPr>
-            <a:normAutofit fontScale="90000"/>
-          </a:bodyPr>
-          <a:lstStyle/>
-          <a:p>
-            <a:r>
-              <a:rPr lang="en-US"/>
-              <a:t>Compliance review: Prevention of Sexual Exploitation and Abuse (PSEA)</a:t>
-            </a:r>
-          </a:p>
-        </p:txBody>
-      </p:sp>
-      <p:sp>
-        <p:nvSpPr>
-          <p:cNvPr id="3" name="Content Placeholder 2">
-            <a:extLst>
-              <a:ext uri="{FF2B5EF4-FFF2-40B4-BE49-F238E27FC236}">
-                <a16:creationId xmlns:a16="http://schemas.microsoft.com/office/drawing/2014/main" id="{9D4C233D-A3F1-8542-3C05-56E2DC056E6B}"/>
-              </a:ext>
-            </a:extLst>
-          </p:cNvPr>
-          <p:cNvSpPr>
-            <a:spLocks noGrp="1"/>
-          </p:cNvSpPr>
-          <p:nvPr>
-            <p:ph idx="1"/>
-          </p:nvPr>
-        </p:nvSpPr>
-        <p:spPr/>
-        <p:txBody>
-          <a:bodyPr/>
-          <a:lstStyle/>
-          <a:p>
-            <a:pPr marL="0" indent="0">
-              <a:buNone/>
-            </a:pPr>
-            <a:r>
-              <a:rPr lang="en-US"/>
-              <a:t>We strictly commit to WFP’s zero-tolerance policy regarding sexual exploitation and abuse, ensuring full alignment with UN standards and contractual mandates:</a:t>
-            </a:r>
-          </a:p>
-          <a:p>
-            <a:r>
-              <a:rPr lang="en-US" sz="2200" b="1"/>
-              <a:t>Internal Policies in Place:</a:t>
-            </a:r>
-            <a:r>
-              <a:rPr lang="en-US" sz="2200"/>
-              <a:t> We have established rigorous internal PSEA policies and behavioral standards matching the ethical expectations of WFP’s Code of Conduct.</a:t>
-            </a:r>
-          </a:p>
-          <a:p>
-            <a:r>
-              <a:rPr lang="en-US" sz="2200" b="1"/>
-              <a:t>Active Awareness Measures:</a:t>
-            </a:r>
-            <a:r>
-              <a:rPr lang="en-US" sz="2200"/>
-              <a:t> We undertake continuous organizational awareness training to ensure all personnel fully understand, prevent, and uphold these mandatory standards.</a:t>
-            </a:r>
-          </a:p>
-          <a:p>
-            <a:r>
-              <a:rPr lang="en-US" sz="2200" b="1"/>
-              <a:t>Accountability &amp; Action:</a:t>
-            </a:r>
-            <a:r>
-              <a:rPr lang="en-US" sz="2200"/>
-              <a:t> We maintain strict mechanisms to prevent misconduct, immediately investigate any allegations, and implement rapid corrective actions.</a:t>
-            </a:r>
-          </a:p>
-          <a:p>
-            <a:endParaRPr lang="en-US"/>
-          </a:p>
-        </p:txBody>
-      </p:sp>
-      <p:sp>
-        <p:nvSpPr>
-          <p:cNvPr id="4" name="Slide Number Placeholder 3">
-            <a:extLst>
-              <a:ext uri="{FF2B5EF4-FFF2-40B4-BE49-F238E27FC236}">
-                <a16:creationId xmlns:a16="http://schemas.microsoft.com/office/drawing/2014/main" id="{A56D1555-50B4-A2DA-B99F-79A78926F0E6}"/>
-              </a:ext>
-            </a:extLst>
-          </p:cNvPr>
-          <p:cNvSpPr>
-            <a:spLocks noGrp="1"/>
-          </p:cNvSpPr>
-          <p:nvPr>
-            <p:ph type="sldNum" sz="quarter" idx="10"/>
-          </p:nvPr>
-        </p:nvSpPr>
-        <p:spPr/>
-        <p:txBody>
-          <a:bodyPr/>
-          <a:lstStyle/>
-          <a:p>
-            <a:fld id="{DE6B2AB2-6265-4A33-A62E-6921C5AD1A87}" type="slidenum">
-              <a:rPr lang="de-DE" altLang="en-US" smtClean="0"/>
-              <a:pPr/>
-              <a:t>19</a:t>
-            </a:fld>
-            <a:endParaRPr lang="de-DE" altLang="en-US"/>
-          </a:p>
-        </p:txBody>
-      </p:sp>
-      <p:sp>
-        <p:nvSpPr>
-          <p:cNvPr id="5" name="Date Placeholder 4">
-            <a:extLst>
-              <a:ext uri="{FF2B5EF4-FFF2-40B4-BE49-F238E27FC236}">
-                <a16:creationId xmlns:a16="http://schemas.microsoft.com/office/drawing/2014/main" id="{58FAA1C9-B37A-864C-51D5-E8A33D1A07E4}"/>
-              </a:ext>
-            </a:extLst>
-          </p:cNvPr>
-          <p:cNvSpPr>
-            <a:spLocks noGrp="1"/>
-          </p:cNvSpPr>
-          <p:nvPr>
-            <p:ph type="dt" sz="half" idx="11"/>
-          </p:nvPr>
-        </p:nvSpPr>
-        <p:spPr/>
-        <p:txBody>
-          <a:bodyPr/>
-          <a:lstStyle/>
-          <a:p>
-            <a:pPr>
-              <a:defRPr/>
-            </a:pPr>
-            <a:r>
-              <a:rPr lang="de-DE"/>
-              <a:t>C4ED | Center for Evaluation and Development</a:t>
-            </a:r>
-          </a:p>
-        </p:txBody>
-      </p:sp>
-    </p:spTree>
-    <p:extLst>
-      <p:ext uri="{BB962C8B-B14F-4D97-AF65-F5344CB8AC3E}">
-        <p14:creationId xmlns:p14="http://schemas.microsoft.com/office/powerpoint/2010/main" val="1949371783"/>
       </p:ext>
     </p:extLst>
   </p:cSld>
@@ -8769,6 +8667,197 @@
         <p:cNvPr id="1" name="">
           <a:extLst>
             <a:ext uri="{FF2B5EF4-FFF2-40B4-BE49-F238E27FC236}">
+              <a16:creationId xmlns:a16="http://schemas.microsoft.com/office/drawing/2014/main" id="{113E768E-375C-767C-6554-9C16F68B14A9}"/>
+            </a:ext>
+          </a:extLst>
+        </p:cNvPr>
+        <p:cNvGrpSpPr/>
+        <p:nvPr/>
+      </p:nvGrpSpPr>
+      <p:grpSpPr>
+        <a:xfrm>
+          <a:off x="0" y="0"/>
+          <a:ext cx="0" cy="0"/>
+          <a:chOff x="0" y="0"/>
+          <a:chExt cx="0" cy="0"/>
+        </a:xfrm>
+      </p:grpSpPr>
+      <p:sp>
+        <p:nvSpPr>
+          <p:cNvPr id="2" name="Title 1">
+            <a:extLst>
+              <a:ext uri="{FF2B5EF4-FFF2-40B4-BE49-F238E27FC236}">
+                <a16:creationId xmlns:a16="http://schemas.microsoft.com/office/drawing/2014/main" id="{26946287-ECCF-FD83-43D5-189E02DCF73F}"/>
+              </a:ext>
+            </a:extLst>
+          </p:cNvPr>
+          <p:cNvSpPr>
+            <a:spLocks noGrp="1"/>
+          </p:cNvSpPr>
+          <p:nvPr>
+            <p:ph type="title"/>
+          </p:nvPr>
+        </p:nvSpPr>
+        <p:spPr/>
+        <p:txBody>
+          <a:bodyPr>
+            <a:normAutofit fontScale="90000"/>
+          </a:bodyPr>
+          <a:lstStyle/>
+          <a:p>
+            <a:r>
+              <a:rPr lang="en-US"/>
+              <a:t>Compliance review: Prevention of Sexual Exploitation and Abuse (PSEA)</a:t>
+            </a:r>
+          </a:p>
+        </p:txBody>
+      </p:sp>
+      <p:sp>
+        <p:nvSpPr>
+          <p:cNvPr id="3" name="Content Placeholder 2">
+            <a:extLst>
+              <a:ext uri="{FF2B5EF4-FFF2-40B4-BE49-F238E27FC236}">
+                <a16:creationId xmlns:a16="http://schemas.microsoft.com/office/drawing/2014/main" id="{9D4C233D-A3F1-8542-3C05-56E2DC056E6B}"/>
+              </a:ext>
+            </a:extLst>
+          </p:cNvPr>
+          <p:cNvSpPr>
+            <a:spLocks noGrp="1"/>
+          </p:cNvSpPr>
+          <p:nvPr>
+            <p:ph idx="1"/>
+          </p:nvPr>
+        </p:nvSpPr>
+        <p:spPr/>
+        <p:txBody>
+          <a:bodyPr/>
+          <a:lstStyle/>
+          <a:p>
+            <a:pPr marL="0" indent="0">
+              <a:buNone/>
+            </a:pPr>
+            <a:r>
+              <a:rPr lang="en-US"/>
+              <a:t>We strictly commit to WFP’s zero-tolerance policy regarding sexual exploitation and abuse, ensuring full alignment with UN standards and contractual mandates:</a:t>
+            </a:r>
+          </a:p>
+          <a:p>
+            <a:r>
+              <a:rPr lang="en-US" sz="2200" b="1"/>
+              <a:t>Internal Policies in Place:</a:t>
+            </a:r>
+            <a:r>
+              <a:rPr lang="en-US" sz="2200"/>
+              <a:t> We have established rigorous internal PSEA policies and behavioral standards matching the ethical expectations of WFP’s Code of Conduct.</a:t>
+            </a:r>
+          </a:p>
+          <a:p>
+            <a:r>
+              <a:rPr lang="en-US" sz="2200" b="1"/>
+              <a:t>Active Awareness Measures:</a:t>
+            </a:r>
+            <a:r>
+              <a:rPr lang="en-US" sz="2200"/>
+              <a:t> We undertake continuous organizational awareness training to ensure all personnel fully understand, prevent, and uphold these mandatory standards.</a:t>
+            </a:r>
+          </a:p>
+          <a:p>
+            <a:r>
+              <a:rPr lang="en-US" sz="2200" b="1"/>
+              <a:t>Accountability &amp; Action:</a:t>
+            </a:r>
+            <a:r>
+              <a:rPr lang="en-US" sz="2200"/>
+              <a:t> We maintain strict mechanisms to prevent misconduct, immediately investigate any allegations, and implement rapid corrective actions.</a:t>
+            </a:r>
+          </a:p>
+          <a:p>
+            <a:endParaRPr lang="en-US"/>
+          </a:p>
+        </p:txBody>
+      </p:sp>
+      <p:sp>
+        <p:nvSpPr>
+          <p:cNvPr id="4" name="Slide Number Placeholder 3">
+            <a:extLst>
+              <a:ext uri="{FF2B5EF4-FFF2-40B4-BE49-F238E27FC236}">
+                <a16:creationId xmlns:a16="http://schemas.microsoft.com/office/drawing/2014/main" id="{A56D1555-50B4-A2DA-B99F-79A78926F0E6}"/>
+              </a:ext>
+            </a:extLst>
+          </p:cNvPr>
+          <p:cNvSpPr>
+            <a:spLocks noGrp="1"/>
+          </p:cNvSpPr>
+          <p:nvPr>
+            <p:ph type="sldNum" sz="quarter" idx="10"/>
+          </p:nvPr>
+        </p:nvSpPr>
+        <p:spPr/>
+        <p:txBody>
+          <a:bodyPr/>
+          <a:lstStyle/>
+          <a:p>
+            <a:fld id="{DE6B2AB2-6265-4A33-A62E-6921C5AD1A87}" type="slidenum">
+              <a:rPr lang="de-DE" altLang="en-US" smtClean="0"/>
+              <a:pPr/>
+              <a:t>20</a:t>
+            </a:fld>
+            <a:endParaRPr lang="de-DE" altLang="en-US"/>
+          </a:p>
+        </p:txBody>
+      </p:sp>
+      <p:sp>
+        <p:nvSpPr>
+          <p:cNvPr id="5" name="Date Placeholder 4">
+            <a:extLst>
+              <a:ext uri="{FF2B5EF4-FFF2-40B4-BE49-F238E27FC236}">
+                <a16:creationId xmlns:a16="http://schemas.microsoft.com/office/drawing/2014/main" id="{58FAA1C9-B37A-864C-51D5-E8A33D1A07E4}"/>
+              </a:ext>
+            </a:extLst>
+          </p:cNvPr>
+          <p:cNvSpPr>
+            <a:spLocks noGrp="1"/>
+          </p:cNvSpPr>
+          <p:nvPr>
+            <p:ph type="dt" sz="half" idx="11"/>
+          </p:nvPr>
+        </p:nvSpPr>
+        <p:spPr/>
+        <p:txBody>
+          <a:bodyPr/>
+          <a:lstStyle/>
+          <a:p>
+            <a:pPr>
+              <a:defRPr/>
+            </a:pPr>
+            <a:r>
+              <a:rPr lang="de-DE"/>
+              <a:t>C4ED | Center for Evaluation and Development</a:t>
+            </a:r>
+          </a:p>
+        </p:txBody>
+      </p:sp>
+    </p:spTree>
+    <p:extLst>
+      <p:ext uri="{BB962C8B-B14F-4D97-AF65-F5344CB8AC3E}">
+        <p14:creationId xmlns:p14="http://schemas.microsoft.com/office/powerpoint/2010/main" val="1949371783"/>
+      </p:ext>
+    </p:extLst>
+  </p:cSld>
+  <p:clrMapOvr>
+    <a:masterClrMapping/>
+  </p:clrMapOvr>
+</p:sld>
+</file>
+
+<file path=ppt/slides/slide21.xml><?xml version="1.0" encoding="utf-8"?>
+<p:sld xmlns:a="http://schemas.openxmlformats.org/drawingml/2006/main" xmlns:r="http://schemas.openxmlformats.org/officeDocument/2006/relationships" xmlns:p="http://schemas.openxmlformats.org/presentationml/2006/main">
+  <p:cSld>
+    <p:spTree>
+      <p:nvGrpSpPr>
+        <p:cNvPr id="1" name="">
+          <a:extLst>
+            <a:ext uri="{FF2B5EF4-FFF2-40B4-BE49-F238E27FC236}">
               <a16:creationId xmlns:a16="http://schemas.microsoft.com/office/drawing/2014/main" id="{6F8329B7-9699-71D8-A5B1-7001751773E9}"/>
             </a:ext>
           </a:extLst>
@@ -8922,7 +9011,7 @@
             <a:fld id="{DE6B2AB2-6265-4A33-A62E-6921C5AD1A87}" type="slidenum">
               <a:rPr lang="de-DE" altLang="en-US" smtClean="0"/>
               <a:pPr/>
-              <a:t>20</a:t>
+              <a:t>21</a:t>
             </a:fld>
             <a:endParaRPr lang="de-DE" altLang="en-US"/>
           </a:p>
@@ -8972,7 +9061,7 @@
 </p:sld>
 </file>
 
-<file path=ppt/slides/slide21.xml><?xml version="1.0" encoding="utf-8"?>
+<file path=ppt/slides/slide22.xml><?xml version="1.0" encoding="utf-8"?>
 <p:sld xmlns:a="http://schemas.openxmlformats.org/drawingml/2006/main" xmlns:r="http://schemas.openxmlformats.org/officeDocument/2006/relationships" xmlns:p="http://schemas.openxmlformats.org/presentationml/2006/main">
   <p:cSld>
     <p:spTree>
@@ -9134,7 +9223,7 @@
             <a:fld id="{DE6B2AB2-6265-4A33-A62E-6921C5AD1A87}" type="slidenum">
               <a:rPr lang="de-DE" altLang="en-US" smtClean="0"/>
               <a:pPr/>
-              <a:t>21</a:t>
+              <a:t>22</a:t>
             </a:fld>
             <a:endParaRPr lang="de-DE" altLang="en-US"/>
           </a:p>
@@ -9184,7 +9273,7 @@
 </p:sld>
 </file>
 
-<file path=ppt/slides/slide22.xml><?xml version="1.0" encoding="utf-8"?>
+<file path=ppt/slides/slide23.xml><?xml version="1.0" encoding="utf-8"?>
 <p:sld xmlns:a="http://schemas.openxmlformats.org/drawingml/2006/main" xmlns:r="http://schemas.openxmlformats.org/officeDocument/2006/relationships" xmlns:p="http://schemas.openxmlformats.org/presentationml/2006/main">
   <p:cSld>
     <p:spTree>
@@ -9260,7 +9349,7 @@
             <a:fld id="{DE6B2AB2-6265-4A33-A62E-6921C5AD1A87}" type="slidenum">
               <a:rPr lang="de-DE" altLang="en-US" smtClean="0"/>
               <a:pPr/>
-              <a:t>22</a:t>
+              <a:t>23</a:t>
             </a:fld>
             <a:endParaRPr lang="de-DE" altLang="en-US"/>
           </a:p>
@@ -9334,7 +9423,7 @@
 </p:sld>
 </file>
 
-<file path=ppt/slides/slide23.xml><?xml version="1.0" encoding="utf-8"?>
+<file path=ppt/slides/slide24.xml><?xml version="1.0" encoding="utf-8"?>
 <p:sld xmlns:a="http://schemas.openxmlformats.org/drawingml/2006/main" xmlns:r="http://schemas.openxmlformats.org/officeDocument/2006/relationships" xmlns:p="http://schemas.openxmlformats.org/presentationml/2006/main">
   <p:cSld>
     <p:spTree>
@@ -9404,7 +9493,7 @@
             <a:fld id="{DE6B2AB2-6265-4A33-A62E-6921C5AD1A87}" type="slidenum">
               <a:rPr lang="de-DE" altLang="en-US" smtClean="0"/>
               <a:pPr/>
-              <a:t>23</a:t>
+              <a:t>24</a:t>
             </a:fld>
             <a:endParaRPr lang="de-DE" altLang="en-US"/>
           </a:p>
@@ -9478,7 +9567,7 @@
 </p:sld>
 </file>
 
-<file path=ppt/slides/slide24.xml><?xml version="1.0" encoding="utf-8"?>
+<file path=ppt/slides/slide25.xml><?xml version="1.0" encoding="utf-8"?>
 <p:sld xmlns:a="http://schemas.openxmlformats.org/drawingml/2006/main" xmlns:r="http://schemas.openxmlformats.org/officeDocument/2006/relationships" xmlns:p="http://schemas.openxmlformats.org/presentationml/2006/main">
   <p:cSld>
     <p:spTree>
@@ -9673,7 +9762,7 @@
             <a:fld id="{DE6B2AB2-6265-4A33-A62E-6921C5AD1A87}" type="slidenum">
               <a:rPr lang="de-DE" altLang="en-US" smtClean="0"/>
               <a:pPr/>
-              <a:t>24</a:t>
+              <a:t>25</a:t>
             </a:fld>
             <a:endParaRPr lang="de-DE" altLang="en-US"/>
           </a:p>
@@ -9723,7 +9812,7 @@
 </p:sld>
 </file>
 
-<file path=ppt/slides/slide25.xml><?xml version="1.0" encoding="utf-8"?>
+<file path=ppt/slides/slide26.xml><?xml version="1.0" encoding="utf-8"?>
 <p:sld xmlns:a="http://schemas.openxmlformats.org/drawingml/2006/main" xmlns:r="http://schemas.openxmlformats.org/officeDocument/2006/relationships" xmlns:p="http://schemas.openxmlformats.org/presentationml/2006/main">
   <p:cSld>
     <p:spTree>
@@ -9827,7 +9916,7 @@
             <a:fld id="{DE6B2AB2-6265-4A33-A62E-6921C5AD1A87}" type="slidenum">
               <a:rPr lang="de-DE" altLang="en-US" smtClean="0"/>
               <a:pPr/>
-              <a:t>25</a:t>
+              <a:t>26</a:t>
             </a:fld>
             <a:endParaRPr lang="de-DE" altLang="en-US"/>
           </a:p>
@@ -9870,86 +9959,6 @@
         <p14:creationId xmlns:p14="http://schemas.microsoft.com/office/powerpoint/2010/main" val="2372887439"/>
       </p:ext>
     </p:extLst>
-  </p:cSld>
-  <p:clrMapOvr>
-    <a:masterClrMapping/>
-  </p:clrMapOvr>
-</p:sld>
-</file>
-
-<file path=ppt/slides/slide26.xml><?xml version="1.0" encoding="utf-8"?>
-<p:sld xmlns:a="http://schemas.openxmlformats.org/drawingml/2006/main" xmlns:p="http://schemas.openxmlformats.org/presentationml/2006/main" xmlns:r="http://schemas.openxmlformats.org/officeDocument/2006/relationships">
-  <p:cSld>
-    <p:spTree>
-      <p:nvGrpSpPr>
-        <p:cNvPr id="1" name=""/>
-        <p:cNvGrpSpPr/>
-        <p:nvPr/>
-      </p:nvGrpSpPr>
-      <p:grpSpPr/>
-      <p:sp>
-        <p:nvSpPr>
-          <p:cNvPr id="2" name="Title 1"/>
-          <p:cNvSpPr>
-            <a:spLocks noGrp="1"/>
-          </p:cNvSpPr>
-          <p:nvPr>
-            <p:ph type="title"/>
-          </p:nvPr>
-        </p:nvSpPr>
-        <p:spPr/>
-        <p:txBody>
-          <a:bodyPr/>
-          <a:lstStyle/>
-          <a:p>
-            <a:r>
-              <a:t>Post-Distribution Monitoring (PDM) deployments</a:t>
-            </a:r>
-          </a:p>
-        </p:txBody>
-      </p:sp>
-      <p:sp>
-        <p:nvSpPr>
-          <p:cNvPr id="3" name="Content Placeholder 2"/>
-          <p:cNvSpPr>
-            <a:spLocks noGrp="1"/>
-          </p:cNvSpPr>
-          <p:nvPr>
-            <p:ph idx="1"/>
-          </p:nvPr>
-        </p:nvSpPr>
-        <p:spPr/>
-        <p:txBody>
-          <a:bodyPr/>
-          <a:lstStyle/>
-          <a:p/>
-        </p:txBody>
-      </p:sp>
-      <p:pic>
-        <p:nvPicPr>
-          <p:cNvPr id="4" name="Picture 3" descr="unnamed-chunk-10-1.png"/>
-          <p:cNvPicPr>
-            <a:picLocks noChangeAspect="1"/>
-          </p:cNvPicPr>
-          <p:nvPr/>
-        </p:nvPicPr>
-        <p:blipFill>
-          <a:blip r:embed="rId2"/>
-          <a:stretch>
-            <a:fillRect/>
-          </a:stretch>
-        </p:blipFill>
-        <p:spPr>
-          <a:xfrm>
-            <a:off x="641943" y="1371600"/>
-            <a:ext cx="10905066" cy="5120640"/>
-          </a:xfrm>
-          <a:prstGeom prst="rect">
-            <a:avLst/>
-          </a:prstGeom>
-        </p:spPr>
-      </p:pic>
-    </p:spTree>
   </p:cSld>
   <p:clrMapOvr>
     <a:masterClrMapping/>
@@ -13606,6 +13615,17 @@
 </file>
 
 <file path=customXml/item1.xml><?xml version="1.0" encoding="utf-8"?>
+<p:properties xmlns:p="http://schemas.microsoft.com/office/2006/metadata/properties" xmlns:xsi="http://www.w3.org/2001/XMLSchema-instance" xmlns:pc="http://schemas.microsoft.com/office/infopath/2007/PartnerControls">
+  <documentManagement>
+    <lcf76f155ced4ddcb4097134ff3c332f xmlns="f1b5c029-f99d-4007-83c8-e86a87dae2c0">
+      <Terms xmlns="http://schemas.microsoft.com/office/infopath/2007/PartnerControls"/>
+    </lcf76f155ced4ddcb4097134ff3c332f>
+    <TaxCatchAll xmlns="b1f2453e-b84f-40dd-ae62-17f8f59f3b8f" xsi:nil="true"/>
+  </documentManagement>
+</p:properties>
+</file>
+
+<file path=customXml/item2.xml><?xml version="1.0" encoding="utf-8"?>
 <ct:contentTypeSchema xmlns:ct="http://schemas.microsoft.com/office/2006/metadata/contentType" xmlns:ma="http://schemas.microsoft.com/office/2006/metadata/properties/metaAttributes" ct:_="" ma:_="" ma:contentTypeName="Dokument" ma:contentTypeID="0x010100CC0EFE16C5685847AF53F415157196AB" ma:contentTypeVersion="10" ma:contentTypeDescription="Ein neues Dokument erstellen." ma:contentTypeScope="" ma:versionID="25e3ba501f4236ce3f30ac36e0670a7a">
   <xsd:schema xmlns:xsd="http://www.w3.org/2001/XMLSchema" xmlns:xs="http://www.w3.org/2001/XMLSchema" xmlns:p="http://schemas.microsoft.com/office/2006/metadata/properties" xmlns:ns2="f1b5c029-f99d-4007-83c8-e86a87dae2c0" xmlns:ns3="b1f2453e-b84f-40dd-ae62-17f8f59f3b8f" targetNamespace="http://schemas.microsoft.com/office/2006/metadata/properties" ma:root="true" ma:fieldsID="ba4304f73c53f4215cc939dedaa1b40a" ns2:_="" ns3:_="">
     <xsd:import namespace="f1b5c029-f99d-4007-83c8-e86a87dae2c0"/>
@@ -13794,17 +13814,6 @@
 </ct:contentTypeSchema>
 </file>
 
-<file path=customXml/item2.xml><?xml version="1.0" encoding="utf-8"?>
-<p:properties xmlns:p="http://schemas.microsoft.com/office/2006/metadata/properties" xmlns:xsi="http://www.w3.org/2001/XMLSchema-instance" xmlns:pc="http://schemas.microsoft.com/office/infopath/2007/PartnerControls">
-  <documentManagement>
-    <lcf76f155ced4ddcb4097134ff3c332f xmlns="f1b5c029-f99d-4007-83c8-e86a87dae2c0">
-      <Terms xmlns="http://schemas.microsoft.com/office/infopath/2007/PartnerControls"/>
-    </lcf76f155ced4ddcb4097134ff3c332f>
-    <TaxCatchAll xmlns="b1f2453e-b84f-40dd-ae62-17f8f59f3b8f" xsi:nil="true"/>
-  </documentManagement>
-</p:properties>
-</file>
-
 <file path=customXml/item3.xml><?xml version="1.0" encoding="utf-8"?>
 <?mso-contentType ?>
 <FormTemplates xmlns="http://schemas.microsoft.com/sharepoint/v3/contenttype/forms">
@@ -13815,6 +13824,19 @@
 </file>
 
 <file path=customXml/itemProps1.xml><?xml version="1.0" encoding="utf-8"?>
+<ds:datastoreItem xmlns:ds="http://schemas.openxmlformats.org/officeDocument/2006/customXml" ds:itemID="{56607D40-FD92-4790-B6B0-937B597933B1}">
+  <ds:schemaRefs>
+    <ds:schemaRef ds:uri="b1f2453e-b84f-40dd-ae62-17f8f59f3b8f"/>
+    <ds:schemaRef ds:uri="f1b5c029-f99d-4007-83c8-e86a87dae2c0"/>
+    <ds:schemaRef ds:uri="http://schemas.microsoft.com/office/2006/metadata/properties"/>
+    <ds:schemaRef ds:uri="http://schemas.microsoft.com/office/infopath/2007/PartnerControls"/>
+    <ds:schemaRef ds:uri="http://www.w3.org/2000/xmlns/"/>
+    <ds:schemaRef ds:uri="http://www.w3.org/2001/XMLSchema-instance"/>
+  </ds:schemaRefs>
+</ds:datastoreItem>
+</file>
+
+<file path=customXml/itemProps2.xml><?xml version="1.0" encoding="utf-8"?>
 <ds:datastoreItem xmlns:ds="http://schemas.openxmlformats.org/officeDocument/2006/customXml" ds:itemID="{B1995A79-68D3-4252-AD9C-327732973C8F}">
   <ds:schemaRefs>
     <ds:schemaRef ds:uri="b1f2453e-b84f-40dd-ae62-17f8f59f3b8f"/>
@@ -13834,19 +13856,6 @@
 </ds:datastoreItem>
 </file>
 
-<file path=customXml/itemProps2.xml><?xml version="1.0" encoding="utf-8"?>
-<ds:datastoreItem xmlns:ds="http://schemas.openxmlformats.org/officeDocument/2006/customXml" ds:itemID="{56607D40-FD92-4790-B6B0-937B597933B1}">
-  <ds:schemaRefs>
-    <ds:schemaRef ds:uri="b1f2453e-b84f-40dd-ae62-17f8f59f3b8f"/>
-    <ds:schemaRef ds:uri="f1b5c029-f99d-4007-83c8-e86a87dae2c0"/>
-    <ds:schemaRef ds:uri="http://schemas.microsoft.com/office/2006/metadata/properties"/>
-    <ds:schemaRef ds:uri="http://schemas.microsoft.com/office/infopath/2007/PartnerControls"/>
-    <ds:schemaRef ds:uri="http://www.w3.org/2000/xmlns/"/>
-    <ds:schemaRef ds:uri="http://www.w3.org/2001/XMLSchema-instance"/>
-  </ds:schemaRefs>
-</ds:datastoreItem>
-</file>
-
 <file path=customXml/itemProps3.xml><?xml version="1.0" encoding="utf-8"?>
 <ds:datastoreItem xmlns:ds="http://schemas.openxmlformats.org/officeDocument/2006/customXml" ds:itemID="{7E227A2B-B7D7-424B-ACEE-2B95D768427B}">
   <ds:schemaRefs>
